--- a/docs/diligence/sapphire-pitch-deck-2026-04-29.pptx
+++ b/docs/diligence/sapphire-pitch-deck-2026-04-29.pptx
@@ -527,7 +527,7 @@
           <a:p/>
           <a:p>
             <a:r>
-              <a:t>Source: HEAD 9074c408 @ docs/diligence/00-executive-summary.md</a:t>
+              <a:t>Source: docs/diligence/00-executive-summary.md + web/acquirer/assets/branding/brand-guidelines.md @ SHA 67e7c0d4</a:t>
             </a:r>
           </a:p>
         </p:txBody>
@@ -609,7 +609,7 @@
           <a:p/>
           <a:p>
             <a:r>
-              <a:t>Source: docs/diligence/09-team-and-process.md + CLAUDE.md @ SHA 9074c408</a:t>
+              <a:t>Source: docs/diligence/09-team-and-process.md + CLAUDE.md @ SHA 67e7c0d4</a:t>
             </a:r>
           </a:p>
         </p:txBody>
@@ -697,7 +697,7 @@
           <a:p/>
           <a:p>
             <a:r>
-              <a:t>Source: docs/diligence/00-executive-summary.md + project_palantir_pitch memory @ SHA 9074c408</a:t>
+              <a:t>Source: docs/diligence/00-executive-summary.md + project_palantir_pitch memory @ SHA 67e7c0d4</a:t>
             </a:r>
           </a:p>
         </p:txBody>
@@ -779,7 +779,7 @@
           <a:p/>
           <a:p>
             <a:r>
-              <a:t>Source: docs/diligence/00-executive-summary.md + project_palantir_pitch memory @ SHA 9074c408</a:t>
+              <a:t>Source: docs/diligence/00-executive-summary.md + project_palantir_pitch memory @ SHA 67e7c0d4</a:t>
             </a:r>
           </a:p>
         </p:txBody>
@@ -855,7 +855,7 @@
           <a:p/>
           <a:p>
             <a:r>
-              <a:t>Source: docs/diligence/ + web/acquirer/index.html @ SHA 9074c408</a:t>
+              <a:t>Source: docs/diligence/ + web/acquirer/index.html @ SHA 67e7c0d4</a:t>
             </a:r>
           </a:p>
         </p:txBody>
@@ -937,7 +937,7 @@
           <a:p/>
           <a:p>
             <a:r>
-              <a:t>Source: lib/core/provenance.py @ SHA 9074c408</a:t>
+              <a:t>Source: lib/core/provenance.py @ SHA 67e7c0d4</a:t>
             </a:r>
           </a:p>
         </p:txBody>
@@ -1013,13 +1013,13 @@
           <a:p/>
           <a:p>
             <a:r>
-              <a:t>Test count is from scripts/ops/test_inventory.py (5,304 collected on 2026-04-28). Live $5 cap is from docs/products/live-trading-ramp-memo.md.</a:t>
+              <a:t>Test count is from scripts/ops/test_inventory.py (5,366 collected on 2026-04-28). Live $5 cap is from docs/products/live-trading-ramp-memo.md.</a:t>
             </a:r>
           </a:p>
           <a:p/>
           <a:p>
             <a:r>
-              <a:t>Source: docs/diligence/00-executive-summary.md @ SHA 9074c408</a:t>
+              <a:t>Source: docs/diligence/00-executive-summary.md @ SHA 67e7c0d4</a:t>
             </a:r>
           </a:p>
         </p:txBody>
@@ -1101,7 +1101,7 @@
           <a:p/>
           <a:p>
             <a:r>
-              <a:t>Source: docs/diligence/01-architecture.md @ SHA 9074c408</a:t>
+              <a:t>Source: docs/diligence/01-architecture.md @ SHA 67e7c0d4</a:t>
             </a:r>
           </a:p>
         </p:txBody>
@@ -1171,7 +1171,7 @@
           <a:lstStyle/>
           <a:p>
             <a:r>
-              <a:t>Fourteen versioned product surfaces. Status colors:</a:t>
+              <a:t>15 packaged product surfaces. Status colors:</a:t>
             </a:r>
           </a:p>
           <a:p>
@@ -1193,7 +1193,7 @@
           <a:p/>
           <a:p>
             <a:r>
-              <a:t>Source: docs/products/*.md @ SHA 9074c408</a:t>
+              <a:t>Source: docs/products/*.md @ SHA 67e7c0d4</a:t>
             </a:r>
           </a:p>
         </p:txBody>
@@ -1275,7 +1275,7 @@
           <a:p/>
           <a:p>
             <a:r>
-              <a:t>Source: docs/security/kill-switch-invariants.md @ SHA 9074c408</a:t>
+              <a:t>Source: docs/security/kill-switch-invariants.md @ SHA 67e7c0d4</a:t>
             </a:r>
           </a:p>
         </p:txBody>
@@ -1350,22 +1350,22 @@
           </a:p>
           <a:p>
             <a:r>
-              <a:t>  • 5,304 tests: from scripts/ops/test_inventory.py output on 2026-04-28 (4,928 unit + 376 plugin)</a:t>
-            </a:r>
-          </a:p>
-          <a:p>
-            <a:r>
-              <a:t>  • 63 plugin tools: 36 top-level + 25 internal + 2 deprecated, per CLAUDE.md and ls plugins/claw-sapphire/tools/</a:t>
-            </a:r>
-          </a:p>
-          <a:p>
-            <a:r>
-              <a:t>  • 32 dashboard pages: per CLAUDE.md and ls services/dashboard/templates/pages/ (38 files; 32 unique product pages)</a:t>
-            </a:r>
-          </a:p>
-          <a:p>
-            <a:r>
-              <a:t>  • 24 LaunchAgents: ls infra/launchagents/ (CLAUDE.md notes 20 in audit snapshot — current count is 24 after recent additions)</a:t>
+              <a:t>  • 5,366 tests: from scripts/ops/test_inventory.py output on 2026-04-28 (4,988 unit + 378 plugin)</a:t>
+            </a:r>
+          </a:p>
+          <a:p>
+            <a:r>
+              <a:t>  • 88 plugin tools: 48 top-level + 38 internal + 2 deprecated, per find plugins/claw-sapphire/tools -name '*.py'</a:t>
+            </a:r>
+          </a:p>
+          <a:p>
+            <a:r>
+              <a:t>  • 38 dashboard page templates: find services/dashboard/templates/pages -maxdepth 1 -type f</a:t>
+            </a:r>
+          </a:p>
+          <a:p>
+            <a:r>
+              <a:t>  • 24 LaunchAgents: find infra/launchagents -maxdepth 1 -type f</a:t>
             </a:r>
           </a:p>
           <a:p>
@@ -1386,7 +1386,7 @@
           <a:p/>
           <a:p>
             <a:r>
-              <a:t>Source: CLAUDE.md + scripts/ops/test_inventory.py @ SHA 9074c408</a:t>
+              <a:t>Source: CLAUDE.md + scripts/ops/test_inventory.py @ SHA 67e7c0d4</a:t>
             </a:r>
           </a:p>
         </p:txBody>
@@ -1484,7 +1484,7 @@
           <a:p/>
           <a:p>
             <a:r>
-              <a:t>Source: docs/competitive/landscape-2026-04-28.md @ SHA 9074c408</a:t>
+              <a:t>Source: docs/competitive/landscape-2026-04-28.md @ SHA 67e7c0d4</a:t>
             </a:r>
           </a:p>
         </p:txBody>
@@ -1566,13 +1566,13 @@
           <a:p/>
           <a:p>
             <a:r>
-              <a:t>For specialty acquirer: emphasize compactness — 5,304 tests, 1 operator, an integrated control plane that demonstrates the safe-autonomy pattern at carve-out scale.</a:t>
+              <a:t>For specialty acquirer: emphasize compactness — 5,366 tests, 1 operator, an integrated control plane that demonstrates the safe-autonomy pattern at carve-out scale.</a:t>
             </a:r>
           </a:p>
           <a:p/>
           <a:p>
             <a:r>
-              <a:t>Source: docs/foundry-ontology-schema.md + docs/products/foundry-ontology-0.2.0.md + project_palantir_pitch memory @ SHA 9074c408</a:t>
+              <a:t>Source: docs/foundry-ontology-schema.md + docs/products/foundry-ontology-0.2.0.md + project_palantir_pitch memory @ SHA 67e7c0d4</a:t>
             </a:r>
           </a:p>
         </p:txBody>
@@ -1660,7 +1660,7 @@
           <a:p/>
           <a:p>
             <a:r>
-              <a:t>Source: docs/products/live-trading-ramp-memo.md @ SHA 9074c408</a:t>
+              <a:t>Source: docs/products/live-trading-ramp-memo.md @ SHA 67e7c0d4</a:t>
             </a:r>
           </a:p>
         </p:txBody>
@@ -4710,45 +4710,30 @@
           </a:p>
         </p:txBody>
       </p:sp>
-      <p:sp>
-        <p:nvSpPr>
-          <p:cNvPr id="3" name="TextBox 2"/>
-          <p:cNvSpPr txBox="1"/>
-          <p:nvPr/>
-        </p:nvSpPr>
-        <p:spPr>
-          <a:xfrm>
-            <a:off x="548640" y="548640"/>
-            <a:ext cx="1828800" cy="365760"/>
-          </a:xfrm>
-          <a:prstGeom prst="rect">
-            <a:avLst/>
-          </a:prstGeom>
-          <a:noFill/>
-        </p:spPr>
-        <p:txBody>
-          <a:bodyPr wrap="square" lIns="0" rIns="0" tIns="0" bIns="0" anchor="t">
-            <a:spAutoFit/>
-          </a:bodyPr>
-          <a:lstStyle/>
-          <a:p>
-            <a:pPr algn="l">
-              <a:lnSpc>
-                <a:spcPct val="115000"/>
-              </a:lnSpc>
-            </a:pPr>
-            <a:r>
-              <a:rPr sz="1200" b="1" i="0">
-                <a:solidFill>
-                  <a:srgbClr val="8EDCFF"/>
-                </a:solidFill>
-                <a:latin typeface="Menlo"/>
-              </a:rPr>
-              <a:t>[ S ]   SAPPHIRE OS</a:t>
-            </a:r>
-          </a:p>
-        </p:txBody>
-      </p:sp>
+      <p:pic>
+        <p:nvPicPr>
+          <p:cNvPr id="3" name="Picture 2" descr="logo-dark-bg.png"/>
+          <p:cNvPicPr>
+            <a:picLocks noChangeAspect="1"/>
+          </p:cNvPicPr>
+          <p:nvPr/>
+        </p:nvPicPr>
+        <p:blipFill>
+          <a:blip r:embed="rId2"/>
+          <a:stretch>
+            <a:fillRect/>
+          </a:stretch>
+        </p:blipFill>
+        <p:spPr>
+          <a:xfrm>
+            <a:off x="548640" y="457200"/>
+            <a:ext cx="2468880" cy="617220"/>
+          </a:xfrm>
+          <a:prstGeom prst="rect">
+            <a:avLst/>
+          </a:prstGeom>
+        </p:spPr>
+      </p:pic>
       <p:sp>
         <p:nvSpPr>
           <p:cNvPr id="4" name="TextBox 3"/>
@@ -4999,7 +4984,7 @@
                 </a:solidFill>
                 <a:latin typeface="Menlo"/>
               </a:rPr>
-              <a:t>HEAD: 9074c408  ·  2026-04-29  ·  arigatoexpress/Sapphire</a:t>
+              <a:t>HEAD: 67e7c0d4  ·  2026-04-29  ·  arigatoexpress/Sapphire</a:t>
             </a:r>
           </a:p>
         </p:txBody>
@@ -5689,7 +5674,7 @@
                 </a:solidFill>
                 <a:latin typeface="Helvetica Neue"/>
               </a:rPr>
-              <a:t>Core repo: arigatoexpress/Sapphire (private). 5,304 tests · 14 product surfaces · 32 dashboard pages.</a:t>
+              <a:t>Core repo: arigatoexpress/Sapphire (private). 5,366 tests · 15 packaged surfaces · 38 dashboard page templates.</a:t>
             </a:r>
           </a:p>
           <a:p>
@@ -9632,7 +9617,7 @@
                 </a:solidFill>
                 <a:latin typeface="Menlo"/>
               </a:rPr>
-              <a:t>HEAD:          9074c408</a:t>
+              <a:t>HEAD:          67e7c0d4</a:t>
             </a:r>
           </a:p>
           <a:p>
@@ -9664,7 +9649,7 @@
                 </a:solidFill>
                 <a:latin typeface="Menlo"/>
               </a:rPr>
-              <a:t>Branch:        docs/sapphire-pitch-deck-2026-04-29</a:t>
+              <a:t>Branch:        docs/sapphire-pitch-deck-refresh-2026-04-28</a:t>
             </a:r>
           </a:p>
           <a:p>
@@ -9920,11 +9905,11 @@
           <a:p>
             <a:pPr algn="l">
               <a:lnSpc>
-                <a:spcPct val="145000"/>
-              </a:lnSpc>
-            </a:pPr>
-            <a:r>
-              <a:rPr sz="1000" b="0" i="0">
+                <a:spcPct val="128000"/>
+              </a:lnSpc>
+            </a:pPr>
+            <a:r>
+              <a:rPr sz="900" b="0" i="0">
                 <a:solidFill>
                   <a:srgbClr val="AAB4D4"/>
                 </a:solidFill>
@@ -9936,11 +9921,11 @@
           <a:p>
             <a:pPr algn="l">
               <a:lnSpc>
-                <a:spcPct val="145000"/>
-              </a:lnSpc>
-            </a:pPr>
-            <a:r>
-              <a:rPr sz="1000" b="0" i="0">
+                <a:spcPct val="128000"/>
+              </a:lnSpc>
+            </a:pPr>
+            <a:r>
+              <a:rPr sz="900" b="0" i="0">
                 <a:solidFill>
                   <a:srgbClr val="AAB4D4"/>
                 </a:solidFill>
@@ -9952,11 +9937,11 @@
           <a:p>
             <a:pPr algn="l">
               <a:lnSpc>
-                <a:spcPct val="145000"/>
-              </a:lnSpc>
-            </a:pPr>
-            <a:r>
-              <a:rPr sz="1000" b="0" i="0">
+                <a:spcPct val="128000"/>
+              </a:lnSpc>
+            </a:pPr>
+            <a:r>
+              <a:rPr sz="900" b="0" i="0">
                 <a:solidFill>
                   <a:srgbClr val="AAB4D4"/>
                 </a:solidFill>
@@ -9968,11 +9953,11 @@
           <a:p>
             <a:pPr algn="l">
               <a:lnSpc>
-                <a:spcPct val="145000"/>
-              </a:lnSpc>
-            </a:pPr>
-            <a:r>
-              <a:rPr sz="1000" b="0" i="0">
+                <a:spcPct val="128000"/>
+              </a:lnSpc>
+            </a:pPr>
+            <a:r>
+              <a:rPr sz="900" b="0" i="0">
                 <a:solidFill>
                   <a:srgbClr val="AAB4D4"/>
                 </a:solidFill>
@@ -9984,27 +9969,27 @@
           <a:p>
             <a:pPr algn="l">
               <a:lnSpc>
-                <a:spcPct val="145000"/>
-              </a:lnSpc>
-            </a:pPr>
-            <a:r>
-              <a:rPr sz="1000" b="0" i="0">
+                <a:spcPct val="128000"/>
+              </a:lnSpc>
+            </a:pPr>
+            <a:r>
+              <a:rPr sz="900" b="0" i="0">
                 <a:solidFill>
                   <a:srgbClr val="AAB4D4"/>
                 </a:solidFill>
                 <a:latin typeface="Menlo"/>
               </a:rPr>
-              <a:t>$ ls plugins/claw-sapphire/tools/*.py | wc -l</a:t>
-            </a:r>
-          </a:p>
-          <a:p>
-            <a:pPr algn="l">
-              <a:lnSpc>
-                <a:spcPct val="145000"/>
-              </a:lnSpc>
-            </a:pPr>
-            <a:r>
-              <a:rPr sz="1000" b="0" i="0">
+              <a:t>$ find plugins/claw-sapphire/tools -type f -name '*.py' | wc -l</a:t>
+            </a:r>
+          </a:p>
+          <a:p>
+            <a:pPr algn="l">
+              <a:lnSpc>
+                <a:spcPct val="128000"/>
+              </a:lnSpc>
+            </a:pPr>
+            <a:r>
+              <a:rPr sz="900" b="0" i="0">
                 <a:solidFill>
                   <a:srgbClr val="AAB4D4"/>
                 </a:solidFill>
@@ -10016,11 +10001,11 @@
           <a:p>
             <a:pPr algn="l">
               <a:lnSpc>
-                <a:spcPct val="145000"/>
-              </a:lnSpc>
-            </a:pPr>
-            <a:r>
-              <a:rPr sz="1000" b="0" i="0">
+                <a:spcPct val="128000"/>
+              </a:lnSpc>
+            </a:pPr>
+            <a:r>
+              <a:rPr sz="900" b="0" i="0">
                 <a:solidFill>
                   <a:srgbClr val="AAB4D4"/>
                 </a:solidFill>
@@ -10032,27 +10017,27 @@
           <a:p>
             <a:pPr algn="l">
               <a:lnSpc>
-                <a:spcPct val="145000"/>
-              </a:lnSpc>
-            </a:pPr>
-            <a:r>
-              <a:rPr sz="1000" b="0" i="0">
+                <a:spcPct val="128000"/>
+              </a:lnSpc>
+            </a:pPr>
+            <a:r>
+              <a:rPr sz="900" b="0" i="0">
                 <a:solidFill>
                   <a:srgbClr val="AAB4D4"/>
                 </a:solidFill>
                 <a:latin typeface="Menlo"/>
               </a:rPr>
-              <a:t>$ ls services/dashboard/templates/pages/ | wc -l</a:t>
-            </a:r>
-          </a:p>
-          <a:p>
-            <a:pPr algn="l">
-              <a:lnSpc>
-                <a:spcPct val="145000"/>
-              </a:lnSpc>
-            </a:pPr>
-            <a:r>
-              <a:rPr sz="1000" b="0" i="0">
+              <a:t>$ find services/dashboard/templates/pages -maxdepth 1 -type f | wc -l</a:t>
+            </a:r>
+          </a:p>
+          <a:p>
+            <a:pPr algn="l">
+              <a:lnSpc>
+                <a:spcPct val="128000"/>
+              </a:lnSpc>
+            </a:pPr>
+            <a:r>
+              <a:rPr sz="900" b="0" i="0">
                 <a:solidFill>
                   <a:srgbClr val="AAB4D4"/>
                 </a:solidFill>
@@ -10064,11 +10049,11 @@
           <a:p>
             <a:pPr algn="l">
               <a:lnSpc>
-                <a:spcPct val="145000"/>
-              </a:lnSpc>
-            </a:pPr>
-            <a:r>
-              <a:rPr sz="1000" b="0" i="0">
+                <a:spcPct val="128000"/>
+              </a:lnSpc>
+            </a:pPr>
+            <a:r>
+              <a:rPr sz="900" b="0" i="0">
                 <a:solidFill>
                   <a:srgbClr val="AAB4D4"/>
                 </a:solidFill>
@@ -10080,11 +10065,11 @@
           <a:p>
             <a:pPr algn="l">
               <a:lnSpc>
-                <a:spcPct val="145000"/>
-              </a:lnSpc>
-            </a:pPr>
-            <a:r>
-              <a:rPr sz="1000" b="0" i="0">
+                <a:spcPct val="128000"/>
+              </a:lnSpc>
+            </a:pPr>
+            <a:r>
+              <a:rPr sz="900" b="0" i="0">
                 <a:solidFill>
                   <a:srgbClr val="AAB4D4"/>
                 </a:solidFill>
@@ -10096,11 +10081,11 @@
           <a:p>
             <a:pPr algn="l">
               <a:lnSpc>
-                <a:spcPct val="145000"/>
-              </a:lnSpc>
-            </a:pPr>
-            <a:r>
-              <a:rPr sz="1000" b="0" i="0">
+                <a:spcPct val="128000"/>
+              </a:lnSpc>
+            </a:pPr>
+            <a:r>
+              <a:rPr sz="900" b="0" i="0">
                 <a:solidFill>
                   <a:srgbClr val="AAB4D4"/>
                 </a:solidFill>
@@ -10112,11 +10097,11 @@
           <a:p>
             <a:pPr algn="l">
               <a:lnSpc>
-                <a:spcPct val="145000"/>
-              </a:lnSpc>
-            </a:pPr>
-            <a:r>
-              <a:rPr sz="1000" b="0" i="0">
+                <a:spcPct val="128000"/>
+              </a:lnSpc>
+            </a:pPr>
+            <a:r>
+              <a:rPr sz="900" b="0" i="0">
                 <a:solidFill>
                   <a:srgbClr val="AAB4D4"/>
                 </a:solidFill>
@@ -10128,11 +10113,11 @@
           <a:p>
             <a:pPr algn="l">
               <a:lnSpc>
-                <a:spcPct val="145000"/>
-              </a:lnSpc>
-            </a:pPr>
-            <a:r>
-              <a:rPr sz="1000" b="0" i="0">
+                <a:spcPct val="128000"/>
+              </a:lnSpc>
+            </a:pPr>
+            <a:r>
+              <a:rPr sz="900" b="0" i="0">
                 <a:solidFill>
                   <a:srgbClr val="AAB4D4"/>
                 </a:solidFill>
@@ -10144,11 +10129,11 @@
           <a:p>
             <a:pPr algn="l">
               <a:lnSpc>
-                <a:spcPct val="145000"/>
-              </a:lnSpc>
-            </a:pPr>
-            <a:r>
-              <a:rPr sz="1000" b="0" i="0">
+                <a:spcPct val="128000"/>
+              </a:lnSpc>
+            </a:pPr>
+            <a:r>
+              <a:rPr sz="900" b="0" i="0">
                 <a:solidFill>
                   <a:srgbClr val="AAB4D4"/>
                 </a:solidFill>
@@ -10160,11 +10145,11 @@
           <a:p>
             <a:pPr algn="l">
               <a:lnSpc>
-                <a:spcPct val="145000"/>
-              </a:lnSpc>
-            </a:pPr>
-            <a:r>
-              <a:rPr sz="1000" b="0" i="0">
+                <a:spcPct val="128000"/>
+              </a:lnSpc>
+            </a:pPr>
+            <a:r>
+              <a:rPr sz="900" b="0" i="0">
                 <a:solidFill>
                   <a:srgbClr val="AAB4D4"/>
                 </a:solidFill>
@@ -10176,11 +10161,11 @@
           <a:p>
             <a:pPr algn="l">
               <a:lnSpc>
-                <a:spcPct val="145000"/>
-              </a:lnSpc>
-            </a:pPr>
-            <a:r>
-              <a:rPr sz="1000" b="0" i="0">
+                <a:spcPct val="128000"/>
+              </a:lnSpc>
+            </a:pPr>
+            <a:r>
+              <a:rPr sz="900" b="0" i="0">
                 <a:solidFill>
                   <a:srgbClr val="AAB4D4"/>
                 </a:solidFill>
@@ -10695,7 +10680,7 @@
                 </a:solidFill>
                 <a:latin typeface="Helvetica Neue"/>
               </a:rPr>
-              <a:t>The differentiators are now separable: Risk Kernel, Provenance, Foundry Ontology, and a 5,304-test gate exist as packaged surfaces. Operator intuition is now file-addressable.</a:t>
+              <a:t>The differentiators are now separable: Risk Kernel, Provenance, Foundry Ontology, and a 5,366-test gate exist as packaged surfaces. Operator intuition is now file-addressable.</a:t>
             </a:r>
           </a:p>
         </p:txBody>
@@ -11320,7 +11305,7 @@
                 </a:solidFill>
                 <a:latin typeface="Helvetica Neue"/>
               </a:rPr>
-              <a:t>Fourteen sellable surfaces. Versioned, tested, separately purchasable.</a:t>
+              <a:t>15 packaged surfaces. Versioned, tested, separately purchasable.</a:t>
             </a:r>
           </a:p>
         </p:txBody>
@@ -11335,7 +11320,7 @@
         </p:nvGraphicFramePr>
         <p:xfrm>
           <a:off x="548640" y="1417320"/>
-          <a:ext cx="11064240" cy="4718304"/>
+          <a:ext cx="11064240" cy="4617720"/>
         </p:xfrm>
         <a:graphic>
           <a:graphicData uri="http://schemas.openxmlformats.org/drawingml/2006/table">
@@ -11419,7 +11404,7 @@
                   </a:tcPr>
                 </a:tc>
               </a:tr>
-              <a:tr h="310896">
+              <a:tr h="283464">
                 <a:tc>
                   <a:txBody>
                     <a:bodyPr wrap="square"/>
@@ -11427,7 +11412,7 @@
                     <a:p>
                       <a:pPr algn="l"/>
                       <a:r>
-                        <a:rPr sz="1050" b="1">
+                        <a:rPr sz="980" b="1">
                           <a:solidFill>
                             <a:srgbClr val="E6ECFF"/>
                           </a:solidFill>
@@ -11450,7 +11435,7 @@
                     <a:p>
                       <a:pPr algn="l"/>
                       <a:r>
-                        <a:rPr sz="1050" b="0">
+                        <a:rPr sz="980" b="0">
                           <a:solidFill>
                             <a:srgbClr val="AAB4D4"/>
                           </a:solidFill>
@@ -11473,7 +11458,7 @@
                     <a:p>
                       <a:pPr algn="l"/>
                       <a:r>
-                        <a:rPr sz="1050" b="1">
+                        <a:rPr sz="980" b="1">
                           <a:solidFill>
                             <a:srgbClr val="6EE7B7"/>
                           </a:solidFill>
@@ -11490,7 +11475,7 @@
                   </a:tcPr>
                 </a:tc>
               </a:tr>
-              <a:tr h="310896">
+              <a:tr h="283464">
                 <a:tc>
                   <a:txBody>
                     <a:bodyPr wrap="square"/>
@@ -11498,7 +11483,7 @@
                     <a:p>
                       <a:pPr algn="l"/>
                       <a:r>
-                        <a:rPr sz="1050" b="1">
+                        <a:rPr sz="980" b="1">
                           <a:solidFill>
                             <a:srgbClr val="E6ECFF"/>
                           </a:solidFill>
@@ -11521,7 +11506,7 @@
                     <a:p>
                       <a:pPr algn="l"/>
                       <a:r>
-                        <a:rPr sz="1050" b="0">
+                        <a:rPr sz="980" b="0">
                           <a:solidFill>
                             <a:srgbClr val="AAB4D4"/>
                           </a:solidFill>
@@ -11544,7 +11529,7 @@
                     <a:p>
                       <a:pPr algn="l"/>
                       <a:r>
-                        <a:rPr sz="1050" b="1">
+                        <a:rPr sz="980" b="1">
                           <a:solidFill>
                             <a:srgbClr val="6EE7B7"/>
                           </a:solidFill>
@@ -11561,7 +11546,7 @@
                   </a:tcPr>
                 </a:tc>
               </a:tr>
-              <a:tr h="310896">
+              <a:tr h="283464">
                 <a:tc>
                   <a:txBody>
                     <a:bodyPr wrap="square"/>
@@ -11569,7 +11554,7 @@
                     <a:p>
                       <a:pPr algn="l"/>
                       <a:r>
-                        <a:rPr sz="1050" b="1">
+                        <a:rPr sz="980" b="1">
                           <a:solidFill>
                             <a:srgbClr val="E6ECFF"/>
                           </a:solidFill>
@@ -11592,7 +11577,7 @@
                     <a:p>
                       <a:pPr algn="l"/>
                       <a:r>
-                        <a:rPr sz="1050" b="0">
+                        <a:rPr sz="980" b="0">
                           <a:solidFill>
                             <a:srgbClr val="AAB4D4"/>
                           </a:solidFill>
@@ -11615,7 +11600,7 @@
                     <a:p>
                       <a:pPr algn="l"/>
                       <a:r>
-                        <a:rPr sz="1050" b="1">
+                        <a:rPr sz="980" b="1">
                           <a:solidFill>
                             <a:srgbClr val="6EE7B7"/>
                           </a:solidFill>
@@ -11632,7 +11617,7 @@
                   </a:tcPr>
                 </a:tc>
               </a:tr>
-              <a:tr h="310896">
+              <a:tr h="283464">
                 <a:tc>
                   <a:txBody>
                     <a:bodyPr wrap="square"/>
@@ -11640,7 +11625,7 @@
                     <a:p>
                       <a:pPr algn="l"/>
                       <a:r>
-                        <a:rPr sz="1050" b="1">
+                        <a:rPr sz="980" b="1">
                           <a:solidFill>
                             <a:srgbClr val="E6ECFF"/>
                           </a:solidFill>
@@ -11663,7 +11648,7 @@
                     <a:p>
                       <a:pPr algn="l"/>
                       <a:r>
-                        <a:rPr sz="1050" b="0">
+                        <a:rPr sz="980" b="0">
                           <a:solidFill>
                             <a:srgbClr val="AAB4D4"/>
                           </a:solidFill>
@@ -11686,7 +11671,7 @@
                     <a:p>
                       <a:pPr algn="l"/>
                       <a:r>
-                        <a:rPr sz="1050" b="1">
+                        <a:rPr sz="980" b="1">
                           <a:solidFill>
                             <a:srgbClr val="FFD166"/>
                           </a:solidFill>
@@ -11703,7 +11688,7 @@
                   </a:tcPr>
                 </a:tc>
               </a:tr>
-              <a:tr h="310896">
+              <a:tr h="283464">
                 <a:tc>
                   <a:txBody>
                     <a:bodyPr wrap="square"/>
@@ -11711,7 +11696,7 @@
                     <a:p>
                       <a:pPr algn="l"/>
                       <a:r>
-                        <a:rPr sz="1050" b="1">
+                        <a:rPr sz="980" b="1">
                           <a:solidFill>
                             <a:srgbClr val="E6ECFF"/>
                           </a:solidFill>
@@ -11734,7 +11719,7 @@
                     <a:p>
                       <a:pPr algn="l"/>
                       <a:r>
-                        <a:rPr sz="1050" b="0">
+                        <a:rPr sz="980" b="0">
                           <a:solidFill>
                             <a:srgbClr val="AAB4D4"/>
                           </a:solidFill>
@@ -11757,7 +11742,7 @@
                     <a:p>
                       <a:pPr algn="l"/>
                       <a:r>
-                        <a:rPr sz="1050" b="1">
+                        <a:rPr sz="980" b="1">
                           <a:solidFill>
                             <a:srgbClr val="FFD166"/>
                           </a:solidFill>
@@ -11774,7 +11759,7 @@
                   </a:tcPr>
                 </a:tc>
               </a:tr>
-              <a:tr h="310896">
+              <a:tr h="283464">
                 <a:tc>
                   <a:txBody>
                     <a:bodyPr wrap="square"/>
@@ -11782,7 +11767,7 @@
                     <a:p>
                       <a:pPr algn="l"/>
                       <a:r>
-                        <a:rPr sz="1050" b="1">
+                        <a:rPr sz="980" b="1">
                           <a:solidFill>
                             <a:srgbClr val="E6ECFF"/>
                           </a:solidFill>
@@ -11805,7 +11790,7 @@
                     <a:p>
                       <a:pPr algn="l"/>
                       <a:r>
-                        <a:rPr sz="1050" b="0">
+                        <a:rPr sz="980" b="0">
                           <a:solidFill>
                             <a:srgbClr val="AAB4D4"/>
                           </a:solidFill>
@@ -11828,7 +11813,7 @@
                     <a:p>
                       <a:pPr algn="l"/>
                       <a:r>
-                        <a:rPr sz="1050" b="1">
+                        <a:rPr sz="980" b="1">
                           <a:solidFill>
                             <a:srgbClr val="6EE7B7"/>
                           </a:solidFill>
@@ -11845,7 +11830,7 @@
                   </a:tcPr>
                 </a:tc>
               </a:tr>
-              <a:tr h="310896">
+              <a:tr h="283464">
                 <a:tc>
                   <a:txBody>
                     <a:bodyPr wrap="square"/>
@@ -11853,7 +11838,7 @@
                     <a:p>
                       <a:pPr algn="l"/>
                       <a:r>
-                        <a:rPr sz="1050" b="1">
+                        <a:rPr sz="980" b="1">
                           <a:solidFill>
                             <a:srgbClr val="E6ECFF"/>
                           </a:solidFill>
@@ -11876,7 +11861,7 @@
                     <a:p>
                       <a:pPr algn="l"/>
                       <a:r>
-                        <a:rPr sz="1050" b="0">
+                        <a:rPr sz="980" b="0">
                           <a:solidFill>
                             <a:srgbClr val="AAB4D4"/>
                           </a:solidFill>
@@ -11899,7 +11884,7 @@
                     <a:p>
                       <a:pPr algn="l"/>
                       <a:r>
-                        <a:rPr sz="1050" b="1">
+                        <a:rPr sz="980" b="1">
                           <a:solidFill>
                             <a:srgbClr val="6EE7B7"/>
                           </a:solidFill>
@@ -11916,7 +11901,7 @@
                   </a:tcPr>
                 </a:tc>
               </a:tr>
-              <a:tr h="310896">
+              <a:tr h="283464">
                 <a:tc>
                   <a:txBody>
                     <a:bodyPr wrap="square"/>
@@ -11924,7 +11909,7 @@
                     <a:p>
                       <a:pPr algn="l"/>
                       <a:r>
-                        <a:rPr sz="1050" b="1">
+                        <a:rPr sz="980" b="1">
                           <a:solidFill>
                             <a:srgbClr val="E6ECFF"/>
                           </a:solidFill>
@@ -11947,7 +11932,7 @@
                     <a:p>
                       <a:pPr algn="l"/>
                       <a:r>
-                        <a:rPr sz="1050" b="0">
+                        <a:rPr sz="980" b="0">
                           <a:solidFill>
                             <a:srgbClr val="AAB4D4"/>
                           </a:solidFill>
@@ -11970,7 +11955,7 @@
                     <a:p>
                       <a:pPr algn="l"/>
                       <a:r>
-                        <a:rPr sz="1050" b="1">
+                        <a:rPr sz="980" b="1">
                           <a:solidFill>
                             <a:srgbClr val="FFD166"/>
                           </a:solidFill>
@@ -11987,7 +11972,7 @@
                   </a:tcPr>
                 </a:tc>
               </a:tr>
-              <a:tr h="310896">
+              <a:tr h="283464">
                 <a:tc>
                   <a:txBody>
                     <a:bodyPr wrap="square"/>
@@ -11995,7 +11980,7 @@
                     <a:p>
                       <a:pPr algn="l"/>
                       <a:r>
-                        <a:rPr sz="1050" b="1">
+                        <a:rPr sz="980" b="1">
                           <a:solidFill>
                             <a:srgbClr val="E6ECFF"/>
                           </a:solidFill>
@@ -12018,7 +12003,7 @@
                     <a:p>
                       <a:pPr algn="l"/>
                       <a:r>
-                        <a:rPr sz="1050" b="0">
+                        <a:rPr sz="980" b="0">
                           <a:solidFill>
                             <a:srgbClr val="AAB4D4"/>
                           </a:solidFill>
@@ -12041,7 +12026,7 @@
                     <a:p>
                       <a:pPr algn="l"/>
                       <a:r>
-                        <a:rPr sz="1050" b="1">
+                        <a:rPr sz="980" b="1">
                           <a:solidFill>
                             <a:srgbClr val="6EE7B7"/>
                           </a:solidFill>
@@ -12058,7 +12043,7 @@
                   </a:tcPr>
                 </a:tc>
               </a:tr>
-              <a:tr h="310896">
+              <a:tr h="283464">
                 <a:tc>
                   <a:txBody>
                     <a:bodyPr wrap="square"/>
@@ -12066,7 +12051,7 @@
                     <a:p>
                       <a:pPr algn="l"/>
                       <a:r>
-                        <a:rPr sz="1050" b="1">
+                        <a:rPr sz="980" b="1">
                           <a:solidFill>
                             <a:srgbClr val="E6ECFF"/>
                           </a:solidFill>
@@ -12089,7 +12074,7 @@
                     <a:p>
                       <a:pPr algn="l"/>
                       <a:r>
-                        <a:rPr sz="1050" b="0">
+                        <a:rPr sz="980" b="0">
                           <a:solidFill>
                             <a:srgbClr val="AAB4D4"/>
                           </a:solidFill>
@@ -12112,7 +12097,7 @@
                     <a:p>
                       <a:pPr algn="l"/>
                       <a:r>
-                        <a:rPr sz="1050" b="1">
+                        <a:rPr sz="980" b="1">
                           <a:solidFill>
                             <a:srgbClr val="FFD166"/>
                           </a:solidFill>
@@ -12129,7 +12114,7 @@
                   </a:tcPr>
                 </a:tc>
               </a:tr>
-              <a:tr h="310896">
+              <a:tr h="283464">
                 <a:tc>
                   <a:txBody>
                     <a:bodyPr wrap="square"/>
@@ -12137,7 +12122,7 @@
                     <a:p>
                       <a:pPr algn="l"/>
                       <a:r>
-                        <a:rPr sz="1050" b="1">
+                        <a:rPr sz="980" b="1">
                           <a:solidFill>
                             <a:srgbClr val="E6ECFF"/>
                           </a:solidFill>
@@ -12160,7 +12145,7 @@
                     <a:p>
                       <a:pPr algn="l"/>
                       <a:r>
-                        <a:rPr sz="1050" b="0">
+                        <a:rPr sz="980" b="0">
                           <a:solidFill>
                             <a:srgbClr val="AAB4D4"/>
                           </a:solidFill>
@@ -12183,7 +12168,7 @@
                     <a:p>
                       <a:pPr algn="l"/>
                       <a:r>
-                        <a:rPr sz="1050" b="1">
+                        <a:rPr sz="980" b="1">
                           <a:solidFill>
                             <a:srgbClr val="6EE7B7"/>
                           </a:solidFill>
@@ -12200,7 +12185,7 @@
                   </a:tcPr>
                 </a:tc>
               </a:tr>
-              <a:tr h="310896">
+              <a:tr h="283464">
                 <a:tc>
                   <a:txBody>
                     <a:bodyPr wrap="square"/>
@@ -12208,7 +12193,7 @@
                     <a:p>
                       <a:pPr algn="l"/>
                       <a:r>
-                        <a:rPr sz="1050" b="1">
+                        <a:rPr sz="980" b="1">
                           <a:solidFill>
                             <a:srgbClr val="E6ECFF"/>
                           </a:solidFill>
@@ -12231,7 +12216,7 @@
                     <a:p>
                       <a:pPr algn="l"/>
                       <a:r>
-                        <a:rPr sz="1050" b="0">
+                        <a:rPr sz="980" b="0">
                           <a:solidFill>
                             <a:srgbClr val="AAB4D4"/>
                           </a:solidFill>
@@ -12254,7 +12239,7 @@
                     <a:p>
                       <a:pPr algn="l"/>
                       <a:r>
-                        <a:rPr sz="1050" b="1">
+                        <a:rPr sz="980" b="1">
                           <a:solidFill>
                             <a:srgbClr val="6EE7B7"/>
                           </a:solidFill>
@@ -12271,7 +12256,7 @@
                   </a:tcPr>
                 </a:tc>
               </a:tr>
-              <a:tr h="310896">
+              <a:tr h="283464">
                 <a:tc>
                   <a:txBody>
                     <a:bodyPr wrap="square"/>
@@ -12279,7 +12264,7 @@
                     <a:p>
                       <a:pPr algn="l"/>
                       <a:r>
-                        <a:rPr sz="1050" b="1">
+                        <a:rPr sz="980" b="1">
                           <a:solidFill>
                             <a:srgbClr val="E6ECFF"/>
                           </a:solidFill>
@@ -12302,7 +12287,7 @@
                     <a:p>
                       <a:pPr algn="l"/>
                       <a:r>
-                        <a:rPr sz="1050" b="0">
+                        <a:rPr sz="980" b="0">
                           <a:solidFill>
                             <a:srgbClr val="AAB4D4"/>
                           </a:solidFill>
@@ -12325,7 +12310,7 @@
                     <a:p>
                       <a:pPr algn="l"/>
                       <a:r>
-                        <a:rPr sz="1050" b="1">
+                        <a:rPr sz="980" b="1">
                           <a:solidFill>
                             <a:srgbClr val="FFD166"/>
                           </a:solidFill>
@@ -12342,7 +12327,7 @@
                   </a:tcPr>
                 </a:tc>
               </a:tr>
-              <a:tr h="310896">
+              <a:tr h="283464">
                 <a:tc>
                   <a:txBody>
                     <a:bodyPr wrap="square"/>
@@ -12350,7 +12335,7 @@
                     <a:p>
                       <a:pPr algn="l"/>
                       <a:r>
-                        <a:rPr sz="1050" b="1">
+                        <a:rPr sz="980" b="1">
                           <a:solidFill>
                             <a:srgbClr val="E6ECFF"/>
                           </a:solidFill>
@@ -12373,7 +12358,7 @@
                     <a:p>
                       <a:pPr algn="l"/>
                       <a:r>
-                        <a:rPr sz="1050" b="0">
+                        <a:rPr sz="980" b="0">
                           <a:solidFill>
                             <a:srgbClr val="AAB4D4"/>
                           </a:solidFill>
@@ -12396,7 +12381,7 @@
                     <a:p>
                       <a:pPr algn="l"/>
                       <a:r>
-                        <a:rPr sz="1050" b="1">
+                        <a:rPr sz="980" b="1">
                           <a:solidFill>
                             <a:srgbClr val="FFD166"/>
                           </a:solidFill>
@@ -12409,6 +12394,77 @@
                   <a:tcPr marL="73152" marR="73152" marT="45720" marB="45720">
                     <a:solidFill>
                       <a:srgbClr val="14213D"/>
+                    </a:solidFill>
+                  </a:tcPr>
+                </a:tc>
+              </a:tr>
+              <a:tr h="283464">
+                <a:tc>
+                  <a:txBody>
+                    <a:bodyPr wrap="square"/>
+                    <a:lstStyle/>
+                    <a:p>
+                      <a:pPr algn="l"/>
+                      <a:r>
+                        <a:rPr sz="980" b="1">
+                          <a:solidFill>
+                            <a:srgbClr val="E6ECFF"/>
+                          </a:solidFill>
+                          <a:latin typeface="Helvetica Neue"/>
+                        </a:rPr>
+                        <a:t>Acquirer Microsite 0.1.0</a:t>
+                      </a:r>
+                    </a:p>
+                  </a:txBody>
+                  <a:tcPr marL="73152" marR="73152" marT="45720" marB="45720">
+                    <a:solidFill>
+                      <a:srgbClr val="111A2E"/>
+                    </a:solidFill>
+                  </a:tcPr>
+                </a:tc>
+                <a:tc>
+                  <a:txBody>
+                    <a:bodyPr wrap="square"/>
+                    <a:lstStyle/>
+                    <a:p>
+                      <a:pPr algn="l"/>
+                      <a:r>
+                        <a:rPr sz="980" b="0">
+                          <a:solidFill>
+                            <a:srgbClr val="AAB4D4"/>
+                          </a:solidFill>
+                          <a:latin typeface="Helvetica Neue"/>
+                        </a:rPr>
+                        <a:t>Static buyer brief with brand assets, no tracking, no remote JS</a:t>
+                      </a:r>
+                    </a:p>
+                  </a:txBody>
+                  <a:tcPr marL="73152" marR="73152" marT="45720" marB="45720">
+                    <a:solidFill>
+                      <a:srgbClr val="111A2E"/>
+                    </a:solidFill>
+                  </a:tcPr>
+                </a:tc>
+                <a:tc>
+                  <a:txBody>
+                    <a:bodyPr wrap="square"/>
+                    <a:lstStyle/>
+                    <a:p>
+                      <a:pPr algn="l"/>
+                      <a:r>
+                        <a:rPr sz="980" b="1">
+                          <a:solidFill>
+                            <a:srgbClr val="6EE7B7"/>
+                          </a:solidFill>
+                          <a:latin typeface="Helvetica Neue"/>
+                        </a:rPr>
+                        <a:t>live (static)</a:t>
+                      </a:r>
+                    </a:p>
+                  </a:txBody>
+                  <a:tcPr marL="73152" marR="73152" marT="45720" marB="45720">
+                    <a:solidFill>
+                      <a:srgbClr val="111A2E"/>
                     </a:solidFill>
                   </a:tcPr>
                 </a:tc>
@@ -14175,7 +14231,7 @@
                 </a:solidFill>
                 <a:latin typeface="Helvetica Neue"/>
               </a:rPr>
-              <a:t>5,304</a:t>
+              <a:t>5,366</a:t>
             </a:r>
           </a:p>
         </p:txBody>
@@ -14340,7 +14396,7 @@
                 </a:solidFill>
                 <a:latin typeface="Helvetica Neue"/>
               </a:rPr>
-              <a:t>63</a:t>
+              <a:t>88</a:t>
             </a:r>
           </a:p>
         </p:txBody>
@@ -14505,7 +14561,7 @@
                 </a:solidFill>
                 <a:latin typeface="Helvetica Neue"/>
               </a:rPr>
-              <a:t>32</a:t>
+              <a:t>38</a:t>
             </a:r>
           </a:p>
         </p:txBody>
@@ -14544,7 +14600,7 @@
                 </a:solidFill>
                 <a:latin typeface="Helvetica Neue"/>
               </a:rPr>
-              <a:t>dashboard pages</a:t>
+              <a:t>dashboard page templates</a:t>
             </a:r>
           </a:p>
         </p:txBody>
@@ -17773,7 +17829,7 @@
                 </a:solidFill>
                 <a:latin typeface="Helvetica Neue"/>
               </a:rPr>
-              <a:t>Sapphire is exactly the right size to be a Foundry pilot tenant: 5,304 tests, 14 productized surfaces, and provenance discipline that maps to your ontology contracts on day one.</a:t>
+              <a:t>Sapphire is exactly the right size to be a Foundry pilot tenant: 5,366 tests, 15 packaged surfaces, and provenance discipline that maps to your ontology contracts on day one.</a:t>
             </a:r>
           </a:p>
         </p:txBody>
